--- a/pitch/seva/margadarshak-seva-2026.pptx
+++ b/pitch/seva/margadarshak-seva-2026.pptx
@@ -1313,7 +1313,7 @@
                   <a:srgbClr val="C3CAE0"/>
                 </a:solidFill>
               </a:rPr>
-              <a:t>Dispatcher built and tested — 214 automated tests. Demonstrator fleet costed at ₹4,759. Nothing has yet carried a passenger.</a:t>
+              <a:t>Dispatcher built and tested — 226 automated tests. Demonstrator fleet costed at ₹4,679. Nothing has yet carried a passenger.</a:t>
             </a:r>
           </a:p>
         </p:txBody>
@@ -5215,7 +5215,7 @@
                 <a:ea typeface="Nirmala UI" pitchFamily="34" charset="-122"/>
                 <a:cs typeface="Nirmala UI" pitchFamily="34" charset="-120"/>
               </a:rPr>
-              <a:t>₹4,759 for two demonstrator chairs (₹2,721 for one). The production retrofit module is designed at about ₹54,000 per chair. A terminal pilot needs chairs, floor marking and a survey.</a:t>
+              <a:t>₹4,679 for two demonstrator chairs (₹2,721 for one). The production retrofit module is designed at about ₹54,000 per chair. A terminal pilot needs chairs, floor marking and a survey.</a:t>
             </a:r>
             <a:endParaRPr lang="en-US" sz="1000" dirty="0"/>
           </a:p>

--- a/pitch/seva/margadarshak-seva-2026.pptx
+++ b/pitch/seva/margadarshak-seva-2026.pptx
@@ -1313,7 +1313,7 @@
                   <a:srgbClr val="C3CAE0"/>
                 </a:solidFill>
               </a:rPr>
-              <a:t>Dispatcher built and tested — 226 automated tests. Demonstrator fleet costed at ₹4,679. Nothing has yet carried a passenger.</a:t>
+              <a:t>Dispatcher built and tested — 251 automated tests. Demonstrator fleet costed at ₹4,759. Nothing has yet carried a passenger.</a:t>
             </a:r>
           </a:p>
         </p:txBody>
@@ -3580,7 +3580,7 @@
                           <a:ea typeface="Nirmala UI" pitchFamily="34" charset="-122"/>
                           <a:cs typeface="Nirmala UI" pitchFamily="34" charset="-120"/>
                         </a:rPr>
-                        <a:t>₹54,000 per chair</a:t>
+                        <a:t>₹57,000 per chair</a:t>
                       </a:r>
                       <a:endParaRPr lang="en-US" sz="1000" dirty="0">
                         <a:latin typeface="Nirmala UI" charset="0"/>
@@ -5215,7 +5215,7 @@
                 <a:ea typeface="Nirmala UI" pitchFamily="34" charset="-122"/>
                 <a:cs typeface="Nirmala UI" pitchFamily="34" charset="-120"/>
               </a:rPr>
-              <a:t>₹4,679 for two demonstrator chairs (₹2,721 for one). The production retrofit module is designed at about ₹54,000 per chair. A terminal pilot needs chairs, floor marking and a survey.</a:t>
+              <a:t>₹4,759 for two demonstrator chairs (₹2,801 for one). The production retrofit module is designed at about ₹57,000 per chair. A terminal pilot needs chairs, floor marking and a survey.</a:t>
             </a:r>
             <a:endParaRPr lang="en-US" sz="1000" dirty="0"/>
           </a:p>

--- a/pitch/seva/margadarshak-seva-2026.pptx
+++ b/pitch/seva/margadarshak-seva-2026.pptx
@@ -1313,7 +1313,7 @@
                   <a:srgbClr val="C3CAE0"/>
                 </a:solidFill>
               </a:rPr>
-              <a:t>Dispatcher built and tested — 251 automated tests. Demonstrator fleet costed at ₹4,759. Nothing has yet carried a passenger.</a:t>
+              <a:t>Dispatcher built and tested — 271 automated tests. Demonstrator fleet costed at ₹4,759. Nothing has yet carried a passenger.</a:t>
             </a:r>
           </a:p>
         </p:txBody>

--- a/pitch/seva/margadarshak-seva-2026.pptx
+++ b/pitch/seva/margadarshak-seva-2026.pptx
@@ -1313,7 +1313,7 @@
                   <a:srgbClr val="C3CAE0"/>
                 </a:solidFill>
               </a:rPr>
-              <a:t>Dispatcher built and tested — 271 automated tests. Demonstrator fleet costed at ₹4,759. Nothing has yet carried a passenger.</a:t>
+              <a:t>Dispatcher built and tested — 277 automated tests. Demonstrator fleet costed at ₹4,759. Nothing has yet carried a passenger.</a:t>
             </a:r>
           </a:p>
         </p:txBody>

--- a/pitch/seva/margadarshak-seva-2026.pptx
+++ b/pitch/seva/margadarshak-seva-2026.pptx
@@ -1313,7 +1313,7 @@
                   <a:srgbClr val="C3CAE0"/>
                 </a:solidFill>
               </a:rPr>
-              <a:t>Dispatcher built and tested — 277 automated tests. Demonstrator fleet costed at ₹4,759. Nothing has yet carried a passenger.</a:t>
+              <a:t>Dispatcher built and tested — 280 automated tests. Demonstrator fleet costed at ₹4,759. Nothing has yet carried a passenger.</a:t>
             </a:r>
           </a:p>
         </p:txBody>

--- a/pitch/seva/margadarshak-seva-2026.pptx
+++ b/pitch/seva/margadarshak-seva-2026.pptx
@@ -1313,7 +1313,7 @@
                   <a:srgbClr val="C3CAE0"/>
                 </a:solidFill>
               </a:rPr>
-              <a:t>Dispatcher built and tested — 280 automated tests. Demonstrator fleet costed at ₹4,759. Nothing has yet carried a passenger.</a:t>
+              <a:t>Dispatcher built and tested — 292 automated tests. Demonstrator fleet costed at ₹4,759. Nothing has yet carried a passenger.</a:t>
             </a:r>
           </a:p>
         </p:txBody>

--- a/pitch/seva/margadarshak-seva-2026.pptx
+++ b/pitch/seva/margadarshak-seva-2026.pptx
@@ -5811,7 +5811,7 @@
                 <a:ea typeface="Nirmala UI" pitchFamily="34" charset="-122"/>
                 <a:cs typeface="Nirmala UI" pitchFamily="34" charset="-120"/>
               </a:rPr>
-              <a:t>[assistance journeys in a first-year pilot at one terminal]</a:t>
+              <a:t>assistance journeys in a first-year pilot at one terminal</a:t>
             </a:r>
             <a:endParaRPr lang="en-US" sz="900" dirty="0"/>
           </a:p>
@@ -5962,7 +5962,7 @@
                 <a:ea typeface="Nirmala UI" pitchFamily="34" charset="-122"/>
                 <a:cs typeface="Nirmala UI" pitchFamily="34" charset="-120"/>
               </a:rPr>
-              <a:t>[passengers per attendant using caravan mode — simulated, not yet measured]</a:t>
+              <a:t>passengers per attendant in caravan mode — simulated, not yet measured</a:t>
             </a:r>
             <a:endParaRPr lang="en-US" sz="900" dirty="0"/>
           </a:p>
@@ -6113,7 +6113,7 @@
                 <a:ea typeface="Nirmala UI" pitchFamily="34" charset="-122"/>
                 <a:cs typeface="Nirmala UI" pitchFamily="34" charset="-120"/>
               </a:rPr>
-              <a:t>[attendant jobs replaced — these are posts airports cannot fill today]</a:t>
+              <a:t>attendant jobs replaced — these are posts airports cannot fill today</a:t>
             </a:r>
             <a:endParaRPr lang="en-US" sz="900" dirty="0"/>
           </a:p>

--- a/pitch/seva/margadarshak-seva-2026.pptx
+++ b/pitch/seva/margadarshak-seva-2026.pptx
@@ -1313,7 +1313,7 @@
                   <a:srgbClr val="C3CAE0"/>
                 </a:solidFill>
               </a:rPr>
-              <a:t>Dispatcher built and tested — 292 automated tests. Demonstrator fleet costed at ₹4,759. Nothing has yet carried a passenger.</a:t>
+              <a:t>Dispatcher built and tested — 338 automated tests. Demonstrator fleet costed at ₹4,759. Nothing has yet carried a passenger.</a:t>
             </a:r>
           </a:p>
         </p:txBody>
@@ -3580,7 +3580,7 @@
                           <a:ea typeface="Nirmala UI" pitchFamily="34" charset="-122"/>
                           <a:cs typeface="Nirmala UI" pitchFamily="34" charset="-120"/>
                         </a:rPr>
-                        <a:t>₹57,000 per chair</a:t>
+                        <a:t>₹58,000 per chair</a:t>
                       </a:r>
                       <a:endParaRPr lang="en-US" sz="1000" dirty="0">
                         <a:latin typeface="Nirmala UI" charset="0"/>
@@ -5215,7 +5215,7 @@
                 <a:ea typeface="Nirmala UI" pitchFamily="34" charset="-122"/>
                 <a:cs typeface="Nirmala UI" pitchFamily="34" charset="-120"/>
               </a:rPr>
-              <a:t>₹4,759 for two demonstrator chairs (₹2,801 for one). The production retrofit module is designed at about ₹57,000 per chair. A terminal pilot needs chairs, floor marking and a survey.</a:t>
+              <a:t>₹4,759 for two demonstrator chairs (₹2,801 for one). The production retrofit module is designed at about ₹58,000 per chair. A terminal pilot needs chairs, floor marking and a survey.</a:t>
             </a:r>
             <a:endParaRPr lang="en-US" sz="1000" dirty="0"/>
           </a:p>
